--- a/2025 09 04_Introduction to Start Campus and SIN02-06.pptx
+++ b/2025 09 04_Introduction to Start Campus and SIN02-06.pptx
@@ -371,7 +371,7 @@
           <a:p>
             <a:fld id="{5E291483-AE46-F84B-81FE-471A1047BB18}" type="datetimeFigureOut">
               <a:rPr lang="en-PT" smtClean="0"/>
-              <a:t>07/07/2026</a:t>
+              <a:t>10/15/2026</a:t>
             </a:fld>
             <a:endParaRPr lang="en-PT"/>
           </a:p>
@@ -548,7 +548,7 @@
           <a:p>
             <a:fld id="{22C8248A-F490-AD4C-B79F-C68C9213EEA2}" type="datetimeFigureOut">
               <a:rPr lang="en-PT" smtClean="0"/>
-              <a:t>07/07/2026</a:t>
+              <a:t>10/15/2026</a:t>
             </a:fld>
             <a:endParaRPr lang="en-PT"/>
           </a:p>
@@ -1741,7 +1741,7 @@
           <a:p>
             <a:fld id="{C764DE79-268F-4C1A-8933-263129D2AF90}" type="datetimeFigureOut">
               <a:rPr lang="en-US" smtClean="0"/>
-              <a:t>7/7/2026</a:t>
+              <a:t>10/15/2026</a:t>
             </a:fld>
             <a:endParaRPr lang="en-US"/>
           </a:p>
@@ -1912,7 +1912,7 @@
           <a:p>
             <a:fld id="{C764DE79-268F-4C1A-8933-263129D2AF90}" type="datetimeFigureOut">
               <a:rPr lang="en-US" smtClean="0"/>
-              <a:t>7/7/2026</a:t>
+              <a:t>10/15/2026</a:t>
             </a:fld>
             <a:endParaRPr lang="en-US"/>
           </a:p>
@@ -2093,7 +2093,7 @@
           <a:p>
             <a:fld id="{C764DE79-268F-4C1A-8933-263129D2AF90}" type="datetimeFigureOut">
               <a:rPr lang="en-US" smtClean="0"/>
-              <a:t>7/7/2026</a:t>
+              <a:t>10/15/2026</a:t>
             </a:fld>
             <a:endParaRPr lang="en-US"/>
           </a:p>
@@ -6166,7 +6166,7 @@
           <a:p>
             <a:fld id="{C764DE79-268F-4C1A-8933-263129D2AF90}" type="datetimeFigureOut">
               <a:rPr lang="en-US" smtClean="0"/>
-              <a:t>7/7/2026</a:t>
+              <a:t>10/15/2026</a:t>
             </a:fld>
             <a:endParaRPr lang="en-US"/>
           </a:p>
@@ -12277,7 +12277,7 @@
           <a:p>
             <a:fld id="{C764DE79-268F-4C1A-8933-263129D2AF90}" type="datetimeFigureOut">
               <a:rPr lang="en-US" smtClean="0"/>
-              <a:t>7/7/2026</a:t>
+              <a:t>10/15/2026</a:t>
             </a:fld>
             <a:endParaRPr lang="en-US"/>
           </a:p>
@@ -17063,7 +17063,7 @@
           <a:p>
             <a:fld id="{C764DE79-268F-4C1A-8933-263129D2AF90}" type="datetimeFigureOut">
               <a:rPr lang="en-US" smtClean="0"/>
-              <a:t>7/7/2026</a:t>
+              <a:t>10/15/2026</a:t>
             </a:fld>
             <a:endParaRPr lang="en-US"/>
           </a:p>
@@ -17810,7 +17810,7 @@
           <a:p>
             <a:fld id="{C764DE79-268F-4C1A-8933-263129D2AF90}" type="datetimeFigureOut">
               <a:rPr lang="en-US" smtClean="0"/>
-              <a:t>7/7/2026</a:t>
+              <a:t>10/15/2026</a:t>
             </a:fld>
             <a:endParaRPr lang="en-US"/>
           </a:p>
@@ -18178,7 +18178,7 @@
           <a:p>
             <a:fld id="{C764DE79-268F-4C1A-8933-263129D2AF90}" type="datetimeFigureOut">
               <a:rPr lang="en-US" smtClean="0"/>
-              <a:t>7/7/2026</a:t>
+              <a:t>10/15/2026</a:t>
             </a:fld>
             <a:endParaRPr lang="en-US"/>
           </a:p>
@@ -18297,7 +18297,7 @@
           <a:p>
             <a:fld id="{C764DE79-268F-4C1A-8933-263129D2AF90}" type="datetimeFigureOut">
               <a:rPr lang="en-US" smtClean="0"/>
-              <a:t>7/7/2026</a:t>
+              <a:t>10/15/2026</a:t>
             </a:fld>
             <a:endParaRPr lang="en-US"/>
           </a:p>
@@ -18393,7 +18393,7 @@
           <a:p>
             <a:fld id="{C764DE79-268F-4C1A-8933-263129D2AF90}" type="datetimeFigureOut">
               <a:rPr lang="en-US" smtClean="0"/>
-              <a:t>7/7/2026</a:t>
+              <a:t>10/15/2026</a:t>
             </a:fld>
             <a:endParaRPr lang="en-US"/>
           </a:p>
@@ -18671,7 +18671,7 @@
           <a:p>
             <a:fld id="{C764DE79-268F-4C1A-8933-263129D2AF90}" type="datetimeFigureOut">
               <a:rPr lang="en-US" smtClean="0"/>
-              <a:t>7/7/2026</a:t>
+              <a:t>10/15/2026</a:t>
             </a:fld>
             <a:endParaRPr lang="en-US"/>
           </a:p>
@@ -19712,7 +19712,7 @@
           <a:p>
             <a:fld id="{C764DE79-268F-4C1A-8933-263129D2AF90}" type="datetimeFigureOut">
               <a:rPr lang="en-US" smtClean="0"/>
-              <a:t>7/7/2026</a:t>
+              <a:t>10/15/2026</a:t>
             </a:fld>
             <a:endParaRPr lang="en-US"/>
           </a:p>
@@ -21502,7 +21502,7 @@
           <a:p>
             <a:fld id="{BE98641A-F24B-AF4E-B735-D7FE0A5C91F1}" type="datetimeFigureOut">
               <a:rPr lang="en-PT" smtClean="0"/>
-              <a:t>07/07/2026</a:t>
+              <a:t>10/15/2026</a:t>
             </a:fld>
             <a:endParaRPr lang="en-PT"/>
           </a:p>
@@ -45477,12 +45477,16 @@
 </file>
 
 <file path=customXml/item1.xml><?xml version="1.0" encoding="utf-8"?>
-<?mso-contentType ?>
-<FormTemplates xmlns="http://schemas.microsoft.com/sharepoint/v3/contenttype/forms">
-  <Display>DocumentLibraryForm</Display>
-  <Edit>DocumentLibraryForm</Edit>
-  <New>DocumentLibraryForm</New>
-</FormTemplates>
+<p:properties xmlns:p="http://schemas.microsoft.com/office/2006/metadata/properties" xmlns:xsi="http://www.w3.org/2001/XMLSchema-instance" xmlns:pc="http://schemas.microsoft.com/office/infopath/2007/PartnerControls">
+  <documentManagement>
+    <_ip_UnifiedCompliancePolicyUIAction xmlns="http://schemas.microsoft.com/sharepoint/v3" xsi:nil="true"/>
+    <_ip_UnifiedCompliancePolicyProperties xmlns="http://schemas.microsoft.com/sharepoint/v3" xsi:nil="true"/>
+    <TaxCatchAll xmlns="c6923647-6c10-4b9b-9e1b-195d02f1da30" xsi:nil="true"/>
+    <lcf76f155ced4ddcb4097134ff3c332f xmlns="b238ed95-c9d5-48cb-87cf-e826bc585f76">
+      <Terms xmlns="http://schemas.microsoft.com/office/infopath/2007/PartnerControls"/>
+    </lcf76f155ced4ddcb4097134ff3c332f>
+  </documentManagement>
+</p:properties>
 </file>
 
 <file path=customXml/item2.xml><?xml version="1.0" encoding="utf-8"?>
@@ -45716,22 +45720,32 @@
 </file>
 
 <file path=customXml/item3.xml><?xml version="1.0" encoding="utf-8"?>
-<p:properties xmlns:p="http://schemas.microsoft.com/office/2006/metadata/properties" xmlns:xsi="http://www.w3.org/2001/XMLSchema-instance" xmlns:pc="http://schemas.microsoft.com/office/infopath/2007/PartnerControls">
-  <documentManagement>
-    <_ip_UnifiedCompliancePolicyUIAction xmlns="http://schemas.microsoft.com/sharepoint/v3" xsi:nil="true"/>
-    <_ip_UnifiedCompliancePolicyProperties xmlns="http://schemas.microsoft.com/sharepoint/v3" xsi:nil="true"/>
-    <TaxCatchAll xmlns="c6923647-6c10-4b9b-9e1b-195d02f1da30" xsi:nil="true"/>
-    <lcf76f155ced4ddcb4097134ff3c332f xmlns="b238ed95-c9d5-48cb-87cf-e826bc585f76">
-      <Terms xmlns="http://schemas.microsoft.com/office/infopath/2007/PartnerControls"/>
-    </lcf76f155ced4ddcb4097134ff3c332f>
-  </documentManagement>
-</p:properties>
+<?mso-contentType ?>
+<FormTemplates xmlns="http://schemas.microsoft.com/sharepoint/v3/contenttype/forms">
+  <Display>DocumentLibraryForm</Display>
+  <Edit>DocumentLibraryForm</Edit>
+  <New>DocumentLibraryForm</New>
+</FormTemplates>
 </file>
 
 <file path=customXml/itemProps1.xml><?xml version="1.0" encoding="utf-8"?>
-<ds:datastoreItem xmlns:ds="http://schemas.openxmlformats.org/officeDocument/2006/customXml" ds:itemID="{BF88C906-C690-4431-8229-4DB84893E3BC}">
+<ds:datastoreItem xmlns:ds="http://schemas.openxmlformats.org/officeDocument/2006/customXml" ds:itemID="{B0BB2D2A-2978-41C4-8E7D-BD9D6AD76E53}">
   <ds:schemaRefs>
-    <ds:schemaRef ds:uri="http://schemas.microsoft.com/sharepoint/v3/contenttype/forms"/>
+    <ds:schemaRef ds:uri="560d7e3e-db78-4707-9bbf-df3493547008"/>
+    <ds:schemaRef ds:uri="ed4199a0-8897-4803-b3df-5666a067b3d5"/>
+    <ds:schemaRef ds:uri="http://purl.org/dc/dcmitype/"/>
+    <ds:schemaRef ds:uri="http://purl.org/dc/elements/1.1/"/>
+    <ds:schemaRef ds:uri="http://purl.org/dc/terms/"/>
+    <ds:schemaRef ds:uri="http://schemas.microsoft.com/office/2006/documentManagement/types"/>
+    <ds:schemaRef ds:uri="http://schemas.microsoft.com/office/2006/metadata/properties"/>
+    <ds:schemaRef ds:uri="http://schemas.microsoft.com/office/infopath/2007/PartnerControls"/>
+    <ds:schemaRef ds:uri="http://schemas.microsoft.com/sharepoint/v3"/>
+    <ds:schemaRef ds:uri="http://schemas.openxmlformats.org/package/2006/metadata/core-properties"/>
+    <ds:schemaRef ds:uri="http://www.w3.org/XML/1998/namespace"/>
+    <ds:schemaRef ds:uri="016add7d-e55c-4146-a284-ba9122d8129a"/>
+    <ds:schemaRef ds:uri="bdc6f771-4085-4435-bf8c-0480790234e4"/>
+    <ds:schemaRef ds:uri="c6923647-6c10-4b9b-9e1b-195d02f1da30"/>
+    <ds:schemaRef ds:uri="b238ed95-c9d5-48cb-87cf-e826bc585f76"/>
   </ds:schemaRefs>
 </ds:datastoreItem>
 </file>
@@ -45757,23 +45771,9 @@
 </file>
 
 <file path=customXml/itemProps3.xml><?xml version="1.0" encoding="utf-8"?>
-<ds:datastoreItem xmlns:ds="http://schemas.openxmlformats.org/officeDocument/2006/customXml" ds:itemID="{B0BB2D2A-2978-41C4-8E7D-BD9D6AD76E53}">
+<ds:datastoreItem xmlns:ds="http://schemas.openxmlformats.org/officeDocument/2006/customXml" ds:itemID="{BF88C906-C690-4431-8229-4DB84893E3BC}">
   <ds:schemaRefs>
-    <ds:schemaRef ds:uri="560d7e3e-db78-4707-9bbf-df3493547008"/>
-    <ds:schemaRef ds:uri="ed4199a0-8897-4803-b3df-5666a067b3d5"/>
-    <ds:schemaRef ds:uri="http://purl.org/dc/dcmitype/"/>
-    <ds:schemaRef ds:uri="http://purl.org/dc/elements/1.1/"/>
-    <ds:schemaRef ds:uri="http://purl.org/dc/terms/"/>
-    <ds:schemaRef ds:uri="http://schemas.microsoft.com/office/2006/documentManagement/types"/>
-    <ds:schemaRef ds:uri="http://schemas.microsoft.com/office/2006/metadata/properties"/>
-    <ds:schemaRef ds:uri="http://schemas.microsoft.com/office/infopath/2007/PartnerControls"/>
-    <ds:schemaRef ds:uri="http://schemas.microsoft.com/sharepoint/v3"/>
-    <ds:schemaRef ds:uri="http://schemas.openxmlformats.org/package/2006/metadata/core-properties"/>
-    <ds:schemaRef ds:uri="http://www.w3.org/XML/1998/namespace"/>
-    <ds:schemaRef ds:uri="016add7d-e55c-4146-a284-ba9122d8129a"/>
-    <ds:schemaRef ds:uri="bdc6f771-4085-4435-bf8c-0480790234e4"/>
-    <ds:schemaRef ds:uri="c6923647-6c10-4b9b-9e1b-195d02f1da30"/>
-    <ds:schemaRef ds:uri="b238ed95-c9d5-48cb-87cf-e826bc585f76"/>
+    <ds:schemaRef ds:uri="http://schemas.microsoft.com/sharepoint/v3/contenttype/forms"/>
   </ds:schemaRefs>
 </ds:datastoreItem>
 </file>
